--- a/CLOUDFORCE_Fraud_Ring_Early_Warning.pptx
+++ b/CLOUDFORCE_Fraud_Ring_Early_Warning.pptx
@@ -3219,24 +3219,105 @@
       </p:pic>
       <p:sp>
         <p:nvSpPr>
-          <p:cNvPr id="5" name="Rectangle 4"/>
+          <p:cNvPr id="5" name="TextBox 4"/>
+          <p:cNvSpPr txBox="1"/>
+          <p:nvPr/>
+        </p:nvSpPr>
+        <p:spPr>
+          <a:xfrm>
+            <a:off x="914400" y="1097280"/>
+            <a:ext cx="10241280" cy="2926080"/>
+          </a:xfrm>
+          <a:prstGeom prst="rect">
+            <a:avLst/>
+          </a:prstGeom>
+          <a:noFill/>
+        </p:spPr>
+        <p:txBody>
+          <a:bodyPr wrap="none">
+            <a:spAutoFit/>
+          </a:bodyPr>
+          <a:lstStyle/>
+          <a:p>
+            <a:r>
+              <a:rPr sz="3400" b="1">
+                <a:solidFill>
+                  <a:srgbClr val="F8FAFC"/>
+                </a:solidFill>
+              </a:rPr>
+              <a:t>Cloudforce Fraud Ring</a:t>
+            </a:r>
+          </a:p>
+          <a:p>
+            <a:pPr>
+              <a:defRPr sz="2200">
+                <a:solidFill>
+                  <a:srgbClr val="38BDF8"/>
+                </a:solidFill>
+              </a:defRPr>
+            </a:pPr>
+            <a:r>
+              <a:t>Fraud Ring Early Warning with TigerGraph</a:t>
+            </a:r>
+          </a:p>
+          <a:p>
+            <a:pPr>
+              <a:defRPr sz="1800">
+                <a:solidFill>
+                  <a:srgbClr val="CBD5E1"/>
+                </a:solidFill>
+              </a:defRPr>
+            </a:pPr>
+            <a:r>
+              <a:t>Detect dense UPI, device, phone, and IP sharing networks before losses spread.</a:t>
+            </a:r>
+          </a:p>
+          <a:p>
+            <a:pPr>
+              <a:defRPr sz="1600">
+                <a:solidFill>
+                  <a:srgbClr val="F59E0B"/>
+                </a:solidFill>
+              </a:defRPr>
+            </a:pPr>
+            <a:r>
+              <a:t>Team: Satyam Mall, Akash, Shaurya Srivastava</a:t>
+            </a:r>
+          </a:p>
+          <a:p>
+            <a:pPr>
+              <a:defRPr sz="1400">
+                <a:solidFill>
+                  <a:srgbClr val="10B981"/>
+                </a:solidFill>
+              </a:defRPr>
+            </a:pPr>
+            <a:r>
+              <a:t>Event: Devacation 2026 Powered by TigerGraph</a:t>
+            </a:r>
+          </a:p>
+        </p:txBody>
+      </p:sp>
+      <p:sp>
+        <p:nvSpPr>
+          <p:cNvPr id="6" name="Rectangle 5"/>
           <p:cNvSpPr/>
           <p:nvPr/>
         </p:nvSpPr>
         <p:spPr>
           <a:xfrm>
-            <a:off x="9646920" y="411480"/>
-            <a:ext cx="1828800" cy="1828800"/>
+            <a:off x="502920" y="6172200"/>
+            <a:ext cx="11155680" cy="320040"/>
           </a:xfrm>
           <a:prstGeom prst="rect">
             <a:avLst/>
           </a:prstGeom>
           <a:solidFill>
-            <a:srgbClr val="10B981"/>
+            <a:srgbClr val="1E293B"/>
           </a:solidFill>
           <a:ln>
             <a:solidFill>
-              <a:srgbClr val="10B981"/>
+              <a:srgbClr val="1E293B"/>
             </a:solidFill>
           </a:ln>
         </p:spPr>
@@ -3262,159 +3343,9 @@
           </a:p>
         </p:txBody>
       </p:sp>
-      <p:pic>
-        <p:nvPicPr>
-          <p:cNvPr id="6" name="Picture 5" descr="tigergraph-logo.png"/>
-          <p:cNvPicPr>
-            <a:picLocks noChangeAspect="1"/>
-          </p:cNvPicPr>
-          <p:nvPr/>
-        </p:nvPicPr>
-        <p:blipFill>
-          <a:blip r:embed="rId2"/>
-          <a:stretch>
-            <a:fillRect/>
-          </a:stretch>
-        </p:blipFill>
-        <p:spPr>
-          <a:xfrm>
-            <a:off x="9784080" y="548640"/>
-            <a:ext cx="1554480" cy="1554480"/>
-          </a:xfrm>
-          <a:prstGeom prst="rect">
-            <a:avLst/>
-          </a:prstGeom>
-        </p:spPr>
-      </p:pic>
       <p:sp>
         <p:nvSpPr>
           <p:cNvPr id="7" name="TextBox 6"/>
-          <p:cNvSpPr txBox="1"/>
-          <p:nvPr/>
-        </p:nvSpPr>
-        <p:spPr>
-          <a:xfrm>
-            <a:off x="914400" y="1097280"/>
-            <a:ext cx="10241280" cy="2926080"/>
-          </a:xfrm>
-          <a:prstGeom prst="rect">
-            <a:avLst/>
-          </a:prstGeom>
-          <a:noFill/>
-        </p:spPr>
-        <p:txBody>
-          <a:bodyPr wrap="none">
-            <a:spAutoFit/>
-          </a:bodyPr>
-          <a:lstStyle/>
-          <a:p>
-            <a:r>
-              <a:rPr sz="3400" b="1">
-                <a:solidFill>
-                  <a:srgbClr val="F8FAFC"/>
-                </a:solidFill>
-              </a:rPr>
-              <a:t>Cloudforce Fraud Ring</a:t>
-            </a:r>
-          </a:p>
-          <a:p>
-            <a:pPr>
-              <a:defRPr sz="2200">
-                <a:solidFill>
-                  <a:srgbClr val="38BDF8"/>
-                </a:solidFill>
-              </a:defRPr>
-            </a:pPr>
-            <a:r>
-              <a:t>Fraud Ring Early Warning with TigerGraph</a:t>
-            </a:r>
-          </a:p>
-          <a:p>
-            <a:pPr>
-              <a:defRPr sz="1800">
-                <a:solidFill>
-                  <a:srgbClr val="CBD5E1"/>
-                </a:solidFill>
-              </a:defRPr>
-            </a:pPr>
-            <a:r>
-              <a:t>Detect dense UPI, device, phone, and IP sharing networks before losses spread.</a:t>
-            </a:r>
-          </a:p>
-          <a:p>
-            <a:pPr>
-              <a:defRPr sz="1600">
-                <a:solidFill>
-                  <a:srgbClr val="F59E0B"/>
-                </a:solidFill>
-              </a:defRPr>
-            </a:pPr>
-            <a:r>
-              <a:t>Team: Satyam Mall, Akash, Shaurya Srivastava</a:t>
-            </a:r>
-          </a:p>
-          <a:p>
-            <a:pPr>
-              <a:defRPr sz="1400">
-                <a:solidFill>
-                  <a:srgbClr val="10B981"/>
-                </a:solidFill>
-              </a:defRPr>
-            </a:pPr>
-            <a:r>
-              <a:t>Event: Devacation 2026 Powered by TigerGraph</a:t>
-            </a:r>
-          </a:p>
-        </p:txBody>
-      </p:sp>
-      <p:sp>
-        <p:nvSpPr>
-          <p:cNvPr id="8" name="Rectangle 7"/>
-          <p:cNvSpPr/>
-          <p:nvPr/>
-        </p:nvSpPr>
-        <p:spPr>
-          <a:xfrm>
-            <a:off x="502920" y="6172200"/>
-            <a:ext cx="11155680" cy="320040"/>
-          </a:xfrm>
-          <a:prstGeom prst="rect">
-            <a:avLst/>
-          </a:prstGeom>
-          <a:solidFill>
-            <a:srgbClr val="1E293B"/>
-          </a:solidFill>
-          <a:ln>
-            <a:solidFill>
-              <a:srgbClr val="1E293B"/>
-            </a:solidFill>
-          </a:ln>
-        </p:spPr>
-        <p:style>
-          <a:lnRef idx="1">
-            <a:schemeClr val="accent1"/>
-          </a:lnRef>
-          <a:fillRef idx="3">
-            <a:schemeClr val="accent1"/>
-          </a:fillRef>
-          <a:effectRef idx="2">
-            <a:schemeClr val="accent1"/>
-          </a:effectRef>
-          <a:fontRef idx="minor">
-            <a:schemeClr val="lt1"/>
-          </a:fontRef>
-        </p:style>
-        <p:txBody>
-          <a:bodyPr rtlCol="0" anchor="ctr"/>
-          <a:lstStyle/>
-          <a:p>
-            <a:pPr algn="ctr"/>
-          </a:p>
-        </p:txBody>
-      </p:sp>
-      <p:sp>
-        <p:nvSpPr>
-          <p:cNvPr id="9" name="TextBox 8"/>
           <p:cNvSpPr txBox="1"/>
           <p:nvPr/>
         </p:nvSpPr>
